--- a/dist/초6/사회·역사/민주주의와경제/초6_사회·역사_민주주의와경제_01_국가기관의역할.pptx
+++ b/dist/초6/사회·역사/민주주의와경제/초6_사회·역사_민주주의와경제_01_국가기관의역할.pptx
@@ -120,13 +120,13 @@
   <p:extLst>
     <p:ext uri="{521415D9-36F7-43E2-AB2F-B90AF26B5E84}">
       <p14:sectionLst xmlns:p14="http://schemas.microsoft.com/office/powerpoint/2010/main">
-        <p14:section name="도입" id="{823c6fb0-803a-e810-a959-46bb2051c414}">
+        <p14:section name="도입" id="{6b1d2bdb-edce-45d2-d68c-58dce8123bf8}">
           <p14:sldIdLst>
             <p14:sldId id="256"/>
             <p14:sldId id="257"/>
           </p14:sldIdLst>
         </p14:section>
-        <p14:section name="개념" id="{d43c7257-2bd1-9d81-88c5-6dd91d8271f7}">
+        <p14:section name="개념" id="{5301766a-6703-1336-0966-88ff61d50dc2}">
           <p14:sldIdLst>
             <p14:sldId id="258"/>
             <p14:sldId id="259"/>
@@ -134,7 +134,7 @@
             <p14:sldId id="262"/>
           </p14:sldIdLst>
         </p14:section>
-        <p14:section name="연습" id="{6d3d59d2-7a3a-2dec-ef88-bb8702b30663}">
+        <p14:section name="연습" id="{709dbffd-392e-d368-74be-f169e93760e0}">
           <p14:sldIdLst>
             <p14:sldId id="260"/>
             <p14:sldId id="263"/>
@@ -142,24 +142,24 @@
             <p14:sldId id="265"/>
           </p14:sldIdLst>
         </p14:section>
-        <p14:section name="개념" id="{9f90be36-dab8-c701-b01c-5410c8d50e22}">
+        <p14:section name="개념" id="{81681cdc-0198-0488-b743-aa57bf4c79c5}">
           <p14:sldIdLst/>
         </p14:section>
-        <p14:section name="연습" id="{15254d8b-5a01-931a-c0eb-d14f2b360c04}">
+        <p14:section name="연습" id="{f521c571-e88c-8567-2d5c-d53d780c1947}">
           <p14:sldIdLst/>
         </p14:section>
-        <p14:section name="확인" id="{f3073c69-3649-855a-a4e2-c406b7941b15}">
+        <p14:section name="확인" id="{fce72387-e636-e273-3baa-49e669a4d4fe}">
           <p14:sldIdLst>
             <p14:sldId id="266"/>
             <p14:sldId id="267"/>
           </p14:sldIdLst>
         </p14:section>
-        <p14:section name="정리" id="{a7f73e27-2152-9869-e757-84e3ba57e893}">
+        <p14:section name="정리" id="{00d199ee-79da-6639-39ab-715b0dba5565}">
           <p14:sldIdLst>
             <p14:sldId id="268"/>
           </p14:sldIdLst>
         </p14:section>
-        <p14:section name="보충" id="{106eb21a-e697-142c-5d81-703ac53b52af}">
+        <p14:section name="보충" id="{c3789831-11f5-0cd5-c570-3e4843a1df61}">
           <p14:sldIdLst>
             <p14:sldId id="269"/>
           </p14:sldIdLst>
